--- a/07. REST API/REST API.pptx
+++ b/07. REST API/REST API.pptx
@@ -2418,7 +2418,7 @@
         </p:nvSpPr>
         <p:spPr>
           <a:xfrm>
-            <a:off x="1143309" y="685800"/>
+            <a:off x="1143000" y="685800"/>
             <a:ext cx="4572000" cy="3429000"/>
           </a:xfrm>
           <a:custGeom>
@@ -2522,7 +2522,7 @@
         </p:nvSpPr>
         <p:spPr>
           <a:xfrm>
-            <a:off x="1143309" y="685800"/>
+            <a:off x="1143000" y="685800"/>
             <a:ext cx="4572000" cy="3429000"/>
           </a:xfrm>
           <a:custGeom>
@@ -2626,7 +2626,7 @@
         </p:nvSpPr>
         <p:spPr>
           <a:xfrm>
-            <a:off x="1143309" y="685800"/>
+            <a:off x="1143000" y="685800"/>
             <a:ext cx="4572000" cy="3429000"/>
           </a:xfrm>
           <a:custGeom>
@@ -2938,7 +2938,7 @@
         </p:nvSpPr>
         <p:spPr>
           <a:xfrm>
-            <a:off x="1143309" y="685800"/>
+            <a:off x="1143000" y="685800"/>
             <a:ext cx="4572000" cy="3429000"/>
           </a:xfrm>
           <a:custGeom>
@@ -11436,7 +11436,7 @@
             </a:pPr>
             <a:r>
               <a:rPr lang="en-GB" dirty="0"/>
-              <a:t>makes it easy to hide low-level protocol details behind simple, high-level abstractions, which promotes openness, programmability, and reusability of services and data regardless of how it is actually stored or encoded</a:t>
+              <a:t>makes it easy to hide low-level protocol details behind simple, high-level abstractions, which promotes openness, programmability, and reusability of services and data regardless of how it is stored or encoded</a:t>
             </a:r>
             <a:endParaRPr dirty="0"/>
           </a:p>
@@ -14618,15 +14618,7 @@
             </a:pPr>
             <a:r>
               <a:rPr lang="en-GB" dirty="0"/>
-              <a:t>verbs are for </a:t>
-            </a:r>
-            <a:r>
-              <a:rPr lang="en-GB" dirty="0" err="1"/>
-              <a:t>HTTPmethods</a:t>
-            </a:r>
-            <a:r>
-              <a:rPr lang="en-GB" dirty="0"/>
-              <a:t>, not for URLs</a:t>
+              <a:t>verbs are for HTTP methods, not for URLs</a:t>
             </a:r>
           </a:p>
           <a:p>
@@ -14791,10 +14783,10 @@
               <a:buChar char="●"/>
             </a:pPr>
             <a:r>
-              <a:rPr lang="en-GB"/>
+              <a:rPr lang="en-GB" dirty="0"/>
               <a:t>A resource is only a concept (abstract idea of a thing), NOT the thing itself</a:t>
             </a:r>
-            <a:endParaRPr/>
+            <a:endParaRPr dirty="0"/>
           </a:p>
           <a:p>
             <a:pPr marL="457200" lvl="0" indent="-342900" algn="l" rtl="0">
@@ -14808,22 +14800,22 @@
               <a:buChar char="●"/>
             </a:pPr>
             <a:r>
-              <a:rPr lang="en-GB"/>
+              <a:rPr lang="en-GB" dirty="0"/>
               <a:t>The tangible instance of a resource is called a </a:t>
             </a:r>
             <a:r>
-              <a:rPr lang="en-GB" b="1"/>
+              <a:rPr lang="en-GB" b="1" dirty="0"/>
               <a:t>representation</a:t>
             </a:r>
             <a:r>
-              <a:rPr lang="en-GB"/>
+              <a:rPr lang="en-GB" dirty="0"/>
               <a:t>, which is a standard encoding of a resource using a </a:t>
             </a:r>
             <a:r>
-              <a:rPr lang="en-GB" b="1"/>
+              <a:rPr lang="en-GB" b="1" dirty="0"/>
               <a:t>type</a:t>
             </a:r>
-            <a:endParaRPr b="1"/>
+            <a:endParaRPr b="1" dirty="0"/>
           </a:p>
           <a:p>
             <a:pPr marL="457200" lvl="0" indent="-342900" algn="l" rtl="0">
@@ -14837,10 +14829,10 @@
               <a:buChar char="●"/>
             </a:pPr>
             <a:r>
-              <a:rPr lang="en-GB"/>
+              <a:rPr lang="en-GB" dirty="0"/>
               <a:t>Standards:</a:t>
             </a:r>
-            <a:endParaRPr/>
+            <a:endParaRPr dirty="0"/>
           </a:p>
           <a:p>
             <a:pPr marL="914400" lvl="1" indent="-317500" algn="l" rtl="0">
@@ -14854,22 +14846,22 @@
               <a:buChar char="○"/>
             </a:pPr>
             <a:r>
-              <a:rPr lang="en-GB" i="1"/>
+              <a:rPr lang="en-GB" i="1" dirty="0"/>
               <a:t>Multipurpose Internet Mail Extensions</a:t>
             </a:r>
             <a:r>
-              <a:rPr lang="en-GB"/>
+              <a:rPr lang="en-GB" dirty="0"/>
               <a:t> (</a:t>
             </a:r>
             <a:r>
-              <a:rPr lang="en-GB" b="1"/>
+              <a:rPr lang="en-GB" b="1" dirty="0"/>
               <a:t>MIME</a:t>
             </a:r>
             <a:r>
-              <a:rPr lang="en-GB"/>
+              <a:rPr lang="en-GB" dirty="0"/>
               <a:t>) describes data formats for Internet </a:t>
             </a:r>
-            <a:endParaRPr/>
+            <a:endParaRPr dirty="0"/>
           </a:p>
           <a:p>
             <a:pPr marL="1371600" lvl="2" indent="-317500" algn="l" rtl="0">
@@ -14883,10 +14875,18 @@
               <a:buChar char="■"/>
             </a:pPr>
             <a:r>
-              <a:rPr lang="en-GB"/>
-              <a:t>the type for an image encoded as PNG is expressed with image/png </a:t>
-            </a:r>
-            <a:endParaRPr/>
+              <a:rPr lang="en-GB" dirty="0"/>
+              <a:t>the type for an image encoded as PNG is expressed with image/</a:t>
+            </a:r>
+            <a:r>
+              <a:rPr lang="en-GB" dirty="0" err="1"/>
+              <a:t>png</a:t>
+            </a:r>
+            <a:r>
+              <a:rPr lang="en-GB" dirty="0"/>
+              <a:t> </a:t>
+            </a:r>
+            <a:endParaRPr dirty="0"/>
           </a:p>
           <a:p>
             <a:pPr marL="1371600" lvl="2" indent="-317500" algn="l" rtl="0">
@@ -14900,10 +14900,10 @@
               <a:buChar char="■"/>
             </a:pPr>
             <a:r>
-              <a:rPr lang="en-GB"/>
+              <a:rPr lang="en-GB" dirty="0"/>
               <a:t>the type for an MP3 audio file with audio/mp3</a:t>
             </a:r>
-            <a:endParaRPr/>
+            <a:endParaRPr dirty="0"/>
           </a:p>
           <a:p>
             <a:pPr marL="914400" lvl="1" indent="-317500" algn="l" rtl="0">
@@ -14917,22 +14917,22 @@
               <a:buChar char="○"/>
             </a:pPr>
             <a:r>
-              <a:rPr lang="en-GB" i="1"/>
+              <a:rPr lang="en-GB" i="1" dirty="0"/>
               <a:t>Internet Assigned Numbers Authority</a:t>
             </a:r>
             <a:r>
-              <a:rPr lang="en-GB"/>
+              <a:rPr lang="en-GB" dirty="0"/>
               <a:t> (</a:t>
             </a:r>
             <a:r>
-              <a:rPr lang="en-GB" b="1"/>
+              <a:rPr lang="en-GB" b="1" dirty="0"/>
               <a:t>IANA</a:t>
             </a:r>
             <a:r>
-              <a:rPr lang="en-GB"/>
+              <a:rPr lang="en-GB" dirty="0"/>
               <a:t>) maintains the list of the all official MIME types</a:t>
             </a:r>
-            <a:endParaRPr/>
+            <a:endParaRPr dirty="0"/>
           </a:p>
           <a:p>
             <a:pPr marL="457200" lvl="0" indent="-342900" algn="l" rtl="0">
@@ -14946,10 +14946,10 @@
               <a:buChar char="●"/>
             </a:pPr>
             <a:r>
-              <a:rPr lang="en-GB"/>
+              <a:rPr lang="en-GB" dirty="0"/>
               <a:t>HTTP Content Negotiation mechanism!</a:t>
             </a:r>
-            <a:endParaRPr/>
+            <a:endParaRPr dirty="0"/>
           </a:p>
           <a:p>
             <a:pPr marL="457200" lvl="0" indent="-342900" algn="l" rtl="0">
@@ -14963,10 +14963,14 @@
               <a:buChar char="●"/>
             </a:pPr>
             <a:r>
-              <a:rPr lang="en-GB"/>
-              <a:t>Formats for WoT</a:t>
-            </a:r>
-            <a:endParaRPr/>
+              <a:rPr lang="en-GB" dirty="0"/>
+              <a:t>Formats for </a:t>
+            </a:r>
+            <a:r>
+              <a:rPr lang="en-GB" dirty="0" err="1"/>
+              <a:t>WoT</a:t>
+            </a:r>
+            <a:endParaRPr dirty="0"/>
           </a:p>
           <a:p>
             <a:pPr marL="914400" lvl="1" indent="-317500" algn="l" rtl="0">
@@ -14980,10 +14984,10 @@
               <a:buChar char="○"/>
             </a:pPr>
             <a:r>
-              <a:rPr lang="en-GB"/>
+              <a:rPr lang="en-GB" dirty="0"/>
               <a:t>today, the best format is JSON</a:t>
             </a:r>
-            <a:endParaRPr/>
+            <a:endParaRPr dirty="0"/>
           </a:p>
           <a:p>
             <a:pPr marL="1371600" marR="0" lvl="2" indent="-317500" algn="l" rtl="0">
@@ -15004,10 +15008,10 @@
               <a:buChar char="■"/>
             </a:pPr>
             <a:r>
-              <a:rPr lang="en-GB"/>
+              <a:rPr lang="en-GB" dirty="0"/>
               <a:t>lightweight, portable, self-contained, and can be easily parsed</a:t>
             </a:r>
-            <a:endParaRPr/>
+            <a:endParaRPr dirty="0"/>
           </a:p>
           <a:p>
             <a:pPr marL="1371600" marR="0" lvl="2" indent="-317500" algn="l" rtl="0">
@@ -15028,10 +15032,10 @@
               <a:buChar char="■"/>
             </a:pPr>
             <a:r>
-              <a:rPr lang="en-GB"/>
-              <a:t>however it isn’t a binary format as it is still text</a:t>
-            </a:r>
-            <a:endParaRPr/>
+              <a:rPr lang="en-GB" dirty="0"/>
+              <a:t>however, it isn’t a binary format as it is still text</a:t>
+            </a:r>
+            <a:endParaRPr dirty="0"/>
           </a:p>
           <a:p>
             <a:pPr marL="914400" lvl="1" indent="-317500" algn="l" rtl="0">
@@ -15045,10 +15049,10 @@
               <a:buChar char="○"/>
             </a:pPr>
             <a:r>
-              <a:rPr lang="en-GB"/>
+              <a:rPr lang="en-GB" dirty="0"/>
               <a:t>Alternative representations formats make sense when a more efficient format is needed</a:t>
             </a:r>
-            <a:endParaRPr/>
+            <a:endParaRPr dirty="0"/>
           </a:p>
           <a:p>
             <a:pPr marL="1371600" marR="0" lvl="2" indent="-317500" algn="l" rtl="0">
@@ -15069,10 +15073,10 @@
               <a:buChar char="■"/>
             </a:pPr>
             <a:r>
-              <a:rPr lang="en-GB"/>
+              <a:rPr lang="en-GB" dirty="0"/>
               <a:t>memory limitations of a device or the fact that it runs on batteries</a:t>
             </a:r>
-            <a:endParaRPr/>
+            <a:endParaRPr dirty="0"/>
           </a:p>
           <a:p>
             <a:pPr marL="914400" lvl="1" indent="-317500" algn="l" rtl="0">
@@ -15086,10 +15090,10 @@
               <a:buChar char="○"/>
             </a:pPr>
             <a:r>
-              <a:rPr lang="en-GB"/>
+              <a:rPr lang="en-GB" dirty="0"/>
               <a:t>formats to translate JSON into a binary format</a:t>
             </a:r>
-            <a:endParaRPr/>
+            <a:endParaRPr dirty="0"/>
           </a:p>
           <a:p>
             <a:pPr marL="1371600" lvl="2" indent="-317500" algn="l" rtl="0">
@@ -15103,19 +15107,19 @@
               <a:buChar char="■"/>
             </a:pPr>
             <a:r>
-              <a:rPr lang="en-GB"/>
+              <a:rPr lang="en-GB" dirty="0"/>
               <a:t>e.g. </a:t>
             </a:r>
             <a:r>
-              <a:rPr lang="en-GB" b="1"/>
+              <a:rPr lang="en-GB" b="1" dirty="0" err="1"/>
               <a:t>MessagePack</a:t>
             </a:r>
             <a:r>
-              <a:rPr lang="en-GB"/>
+              <a:rPr lang="en-GB" dirty="0"/>
               <a:t> (not yet and official MIME type, </a:t>
             </a:r>
             <a:r>
-              <a:rPr lang="en-GB" u="sng">
+              <a:rPr lang="en-GB" u="sng" dirty="0">
                 <a:solidFill>
                   <a:schemeClr val="hlink"/>
                 </a:solidFill>
@@ -15124,10 +15128,10 @@
               <a:t>https://msgpack.org/</a:t>
             </a:r>
             <a:r>
-              <a:rPr lang="en-GB"/>
+              <a:rPr lang="en-GB" dirty="0"/>
               <a:t>)</a:t>
             </a:r>
-            <a:endParaRPr/>
+            <a:endParaRPr dirty="0"/>
           </a:p>
           <a:p>
             <a:pPr marL="457200" lvl="0" indent="-342900" algn="l" rtl="0">
@@ -15141,14 +15145,14 @@
               <a:buChar char="●"/>
             </a:pPr>
             <a:r>
-              <a:rPr lang="en-GB" b="1"/>
+              <a:rPr lang="en-GB" b="1" dirty="0"/>
               <a:t>Guidelines</a:t>
             </a:r>
             <a:r>
-              <a:rPr lang="en-GB"/>
+              <a:rPr lang="en-GB" dirty="0"/>
               <a:t>:</a:t>
             </a:r>
-            <a:endParaRPr/>
+            <a:endParaRPr dirty="0"/>
           </a:p>
           <a:p>
             <a:pPr marL="914400" lvl="1" indent="-317500" algn="l" rtl="0">
@@ -15162,10 +15166,10 @@
               <a:buChar char="○"/>
             </a:pPr>
             <a:r>
-              <a:rPr lang="en-GB"/>
+              <a:rPr lang="en-GB" dirty="0"/>
               <a:t>Things MUST support JSON as their default representation</a:t>
             </a:r>
-            <a:endParaRPr/>
+            <a:endParaRPr dirty="0"/>
           </a:p>
           <a:p>
             <a:pPr marL="914400" lvl="1" indent="-317500" algn="l" rtl="0">
@@ -15179,10 +15183,10 @@
               <a:buChar char="○"/>
             </a:pPr>
             <a:r>
-              <a:rPr lang="en-GB"/>
+              <a:rPr lang="en-GB" dirty="0"/>
               <a:t>Things MAY offer an HTML interface/representation (UI)</a:t>
             </a:r>
-            <a:endParaRPr/>
+            <a:endParaRPr dirty="0"/>
           </a:p>
           <a:p>
             <a:pPr marL="0" lvl="0" indent="0" algn="l" rtl="0">
@@ -15194,7 +15198,7 @@
               </a:spcAft>
               <a:buNone/>
             </a:pPr>
-            <a:endParaRPr/>
+            <a:endParaRPr dirty="0"/>
           </a:p>
         </p:txBody>
       </p:sp>
@@ -15331,18 +15335,18 @@
               <a:buChar char="●"/>
             </a:pPr>
             <a:r>
-              <a:rPr lang="en-GB"/>
-              <a:t>REST emphasizes that every resource has to support a</a:t>
-            </a:r>
-            <a:r>
-              <a:rPr lang="en-GB" b="1"/>
+              <a:rPr lang="en-GB" dirty="0"/>
+              <a:t>REST emphasizes that every resource must support a</a:t>
+            </a:r>
+            <a:r>
+              <a:rPr lang="en-GB" b="1" dirty="0"/>
               <a:t> standard, common set of operations</a:t>
             </a:r>
             <a:r>
-              <a:rPr lang="en-GB"/>
-              <a:t> with clearly defined semantics and behavior </a:t>
-            </a:r>
-            <a:endParaRPr/>
+              <a:rPr lang="en-GB" dirty="0"/>
+              <a:t> with clearly defined semantics and behaviour </a:t>
+            </a:r>
+            <a:endParaRPr dirty="0"/>
           </a:p>
           <a:p>
             <a:pPr marL="914400" lvl="1" indent="-317500" algn="l" rtl="0">
@@ -15356,10 +15360,10 @@
               <a:buChar char="○"/>
             </a:pPr>
             <a:r>
-              <a:rPr lang="en-GB"/>
+              <a:rPr lang="en-GB" dirty="0"/>
               <a:t>HTTP verbs: GET, POST, PUT, DELETE.</a:t>
             </a:r>
-            <a:endParaRPr/>
+            <a:endParaRPr dirty="0"/>
           </a:p>
           <a:p>
             <a:pPr marL="457200" lvl="0" indent="-342900" algn="l" rtl="0">
@@ -15373,18 +15377,18 @@
               <a:buChar char="●"/>
             </a:pPr>
             <a:r>
-              <a:rPr lang="en-GB"/>
+              <a:rPr lang="en-GB" dirty="0"/>
               <a:t>Enable </a:t>
             </a:r>
             <a:r>
-              <a:rPr lang="en-GB" b="1"/>
+              <a:rPr lang="en-GB" b="1" dirty="0"/>
               <a:t>loose coupling</a:t>
             </a:r>
             <a:r>
-              <a:rPr lang="en-GB"/>
+              <a:rPr lang="en-GB" dirty="0"/>
               <a:t>:</a:t>
             </a:r>
-            <a:endParaRPr/>
+            <a:endParaRPr dirty="0"/>
           </a:p>
           <a:p>
             <a:pPr marL="914400" lvl="1" indent="-317500" algn="l" rtl="0">
@@ -15398,10 +15402,10 @@
               <a:buChar char="○"/>
             </a:pPr>
             <a:r>
-              <a:rPr lang="en-GB"/>
+              <a:rPr lang="en-GB" dirty="0"/>
               <a:t>clients only need to support mechanisms to handle these methods</a:t>
             </a:r>
-            <a:endParaRPr/>
+            <a:endParaRPr dirty="0"/>
           </a:p>
           <a:p>
             <a:pPr marL="457200" lvl="0" indent="-342900" algn="l" rtl="0">
@@ -15415,10 +15419,18 @@
               <a:buChar char="●"/>
             </a:pPr>
             <a:r>
-              <a:rPr lang="en-GB"/>
-              <a:t>In WoT, these operations map naturally:</a:t>
-            </a:r>
-            <a:endParaRPr/>
+              <a:rPr lang="en-GB" dirty="0"/>
+              <a:t>In </a:t>
+            </a:r>
+            <a:r>
+              <a:rPr lang="en-GB" dirty="0" err="1"/>
+              <a:t>WoT</a:t>
+            </a:r>
+            <a:r>
+              <a:rPr lang="en-GB" dirty="0"/>
+              <a:t>, these operations map naturally:</a:t>
+            </a:r>
+            <a:endParaRPr dirty="0"/>
           </a:p>
           <a:p>
             <a:pPr marL="914400" lvl="1" indent="-317500" algn="l" rtl="0">
@@ -15432,10 +15444,10 @@
               <a:buChar char="○"/>
             </a:pPr>
             <a:r>
-              <a:rPr lang="en-GB"/>
+              <a:rPr lang="en-GB" dirty="0"/>
               <a:t>things usually offer simple and atomic services </a:t>
             </a:r>
-            <a:endParaRPr/>
+            <a:endParaRPr dirty="0"/>
           </a:p>
           <a:p>
             <a:pPr marL="914400" lvl="1" indent="-317500" algn="l" rtl="0">
@@ -15449,18 +15461,18 @@
               <a:buChar char="○"/>
             </a:pPr>
             <a:r>
-              <a:rPr lang="en-GB"/>
+              <a:rPr lang="en-GB" dirty="0"/>
               <a:t>usually reduced to the four basic </a:t>
             </a:r>
             <a:r>
-              <a:rPr lang="en-GB" b="1"/>
+              <a:rPr lang="en-GB" b="1" dirty="0"/>
               <a:t>CRUD operation</a:t>
             </a:r>
             <a:r>
-              <a:rPr lang="en-GB"/>
+              <a:rPr lang="en-GB" dirty="0"/>
               <a:t> types (Create, Read, Update, Delete)</a:t>
             </a:r>
-            <a:endParaRPr/>
+            <a:endParaRPr dirty="0"/>
           </a:p>
           <a:p>
             <a:pPr marL="457200" lvl="0" indent="-342900" algn="l" rtl="0">
@@ -15474,10 +15486,10 @@
               <a:buChar char="●"/>
             </a:pPr>
             <a:r>
-              <a:rPr lang="en-GB"/>
+              <a:rPr lang="en-GB" dirty="0"/>
               <a:t>HTTP errors: a lightweight, powerful and standard way of notifying abnormal and successful request execution</a:t>
             </a:r>
-            <a:endParaRPr/>
+            <a:endParaRPr dirty="0"/>
           </a:p>
           <a:p>
             <a:pPr marL="457200" lvl="0" indent="-342900" algn="l" rtl="0">
@@ -15491,10 +15503,10 @@
               <a:buChar char="●"/>
             </a:pPr>
             <a:r>
-              <a:rPr lang="en-GB"/>
+              <a:rPr lang="en-GB" dirty="0"/>
               <a:t>Guidelines:</a:t>
             </a:r>
-            <a:endParaRPr/>
+            <a:endParaRPr dirty="0"/>
           </a:p>
           <a:p>
             <a:pPr marL="914400" lvl="1" indent="-317500" algn="l" rtl="0">
@@ -15508,10 +15520,10 @@
               <a:buChar char="○"/>
             </a:pPr>
             <a:r>
-              <a:rPr lang="en-GB"/>
+              <a:rPr lang="en-GB" dirty="0"/>
               <a:t>Web Things MUST support the GET to retrieve a sensor resource (e.g., a temperature reading), POST to create a new resource (e.g., to create a rule) that will get a new URL, PUT to update an actuator resource given its URL (e.g., updating an LED) and DELETE is used to remove a resource from a collection of resources (e.g., removing a rule).</a:t>
             </a:r>
-            <a:endParaRPr/>
+            <a:endParaRPr dirty="0"/>
           </a:p>
           <a:p>
             <a:pPr marL="914400" lvl="1" indent="-317500" algn="l" rtl="0">
@@ -15525,10 +15537,10 @@
               <a:buChar char="○"/>
             </a:pPr>
             <a:r>
-              <a:rPr lang="en-GB"/>
+              <a:rPr lang="en-GB" dirty="0"/>
               <a:t>Web Things MUST implement HTTP status codes 20x, 40x, 50x</a:t>
             </a:r>
-            <a:endParaRPr/>
+            <a:endParaRPr dirty="0"/>
           </a:p>
           <a:p>
             <a:pPr marL="914400" lvl="1" indent="-317500" algn="l" rtl="0">
@@ -15542,10 +15554,10 @@
               <a:buChar char="○"/>
             </a:pPr>
             <a:r>
-              <a:rPr lang="en-GB"/>
+              <a:rPr lang="en-GB" dirty="0"/>
               <a:t>Web Things MUST support a GET on their root URL, so that a client is always able to access information about the device</a:t>
             </a:r>
-            <a:endParaRPr/>
+            <a:endParaRPr dirty="0"/>
           </a:p>
           <a:p>
             <a:pPr marL="0" lvl="0" indent="0" algn="l" rtl="0">
@@ -15557,7 +15569,7 @@
               </a:spcAft>
               <a:buNone/>
             </a:pPr>
-            <a:endParaRPr/>
+            <a:endParaRPr dirty="0"/>
           </a:p>
         </p:txBody>
       </p:sp>
@@ -15651,10 +15663,10 @@
               <a:buNone/>
             </a:pPr>
             <a:r>
-              <a:rPr lang="en-GB"/>
+              <a:rPr lang="en-GB" dirty="0"/>
               <a:t>Principle 4: HATEOAS</a:t>
             </a:r>
-            <a:endParaRPr/>
+            <a:endParaRPr dirty="0"/>
           </a:p>
         </p:txBody>
       </p:sp>
@@ -15694,10 +15706,10 @@
               <a:buChar char="●"/>
             </a:pPr>
             <a:r>
-              <a:rPr lang="en-GB"/>
+              <a:rPr lang="en-GB" dirty="0"/>
               <a:t>HATEOAS: Hypermedia as the Engine of Application State</a:t>
             </a:r>
-            <a:endParaRPr/>
+            <a:endParaRPr dirty="0"/>
           </a:p>
           <a:p>
             <a:pPr marL="457200" lvl="0" indent="-342900" algn="l" rtl="0">
@@ -15711,10 +15723,10 @@
               <a:buChar char="●"/>
             </a:pPr>
             <a:r>
-              <a:rPr lang="en-GB"/>
+              <a:rPr lang="en-GB" dirty="0"/>
               <a:t>Two sub-concepts</a:t>
             </a:r>
-            <a:endParaRPr/>
+            <a:endParaRPr dirty="0"/>
           </a:p>
           <a:p>
             <a:pPr marL="914400" lvl="1" indent="-317500" algn="l" rtl="0">
@@ -15728,10 +15740,10 @@
               <a:buChar char="○"/>
             </a:pPr>
             <a:r>
-              <a:rPr lang="en-GB"/>
+              <a:rPr lang="en-GB" dirty="0"/>
               <a:t>Hypermedia</a:t>
             </a:r>
-            <a:endParaRPr/>
+            <a:endParaRPr dirty="0"/>
           </a:p>
           <a:p>
             <a:pPr marL="1371600" lvl="2" indent="-317500" algn="l" rtl="0">
@@ -15745,10 +15757,18 @@
               <a:buChar char="■"/>
             </a:pPr>
             <a:r>
-              <a:rPr lang="en-GB"/>
-              <a:t>the idea of using links as connection between related resources</a:t>
-            </a:r>
-            <a:endParaRPr/>
+              <a:rPr lang="en-GB" dirty="0"/>
+              <a:t>the idea of </a:t>
+            </a:r>
+            <a:r>
+              <a:rPr lang="en-GB" b="1" dirty="0"/>
+              <a:t>using links as connection</a:t>
+            </a:r>
+            <a:r>
+              <a:rPr lang="en-GB" dirty="0"/>
+              <a:t> between related resources</a:t>
+            </a:r>
+            <a:endParaRPr dirty="0"/>
           </a:p>
           <a:p>
             <a:pPr marL="914400" lvl="1" indent="-317500" algn="l" rtl="0">
@@ -15762,10 +15782,10 @@
               <a:buChar char="○"/>
             </a:pPr>
             <a:r>
-              <a:rPr lang="en-GB"/>
+              <a:rPr lang="en-GB" dirty="0"/>
               <a:t>Application State</a:t>
             </a:r>
-            <a:endParaRPr/>
+            <a:endParaRPr dirty="0"/>
           </a:p>
           <a:p>
             <a:pPr marL="1371600" lvl="2" indent="-317500" algn="l" rtl="0">
@@ -15779,10 +15799,18 @@
               <a:buChar char="■"/>
             </a:pPr>
             <a:r>
-              <a:rPr lang="en-GB"/>
-              <a:t>a step in a process or workflow</a:t>
-            </a:r>
-            <a:endParaRPr/>
+              <a:rPr lang="en-GB" dirty="0"/>
+              <a:t>a </a:t>
+            </a:r>
+            <a:r>
+              <a:rPr lang="en-GB" b="1" dirty="0"/>
+              <a:t>step in a process </a:t>
+            </a:r>
+            <a:r>
+              <a:rPr lang="en-GB" dirty="0"/>
+              <a:t>or workflow</a:t>
+            </a:r>
+            <a:endParaRPr dirty="0"/>
           </a:p>
           <a:p>
             <a:pPr marL="457200" lvl="0" indent="-342900" algn="l" rtl="0">
@@ -15796,10 +15824,10 @@
               <a:buChar char="●"/>
             </a:pPr>
             <a:r>
-              <a:rPr lang="en-GB"/>
-              <a:t>Each possible state of a device needs to be a RESTful resource with its own unique URL, where any client can retrieve a representation of the current state and also the possible transitions to other states</a:t>
-            </a:r>
-            <a:endParaRPr/>
+              <a:rPr lang="en-GB" dirty="0"/>
+              <a:t>Each possible state needs to be a RESTful resource with its own unique URL, where any client can retrieve a representation of the current state and the possible transitions to other states</a:t>
+            </a:r>
+            <a:endParaRPr dirty="0"/>
           </a:p>
           <a:p>
             <a:pPr marL="914400" lvl="1" indent="-317500" algn="l" rtl="0">
@@ -15813,10 +15841,26 @@
               <a:buChar char="○"/>
             </a:pPr>
             <a:r>
-              <a:rPr lang="en-GB"/>
-              <a:t>the status of an LED is kept on the server and each request is answered with a representation of the current state and with the necessary information on how to change the LED state</a:t>
-            </a:r>
-            <a:endParaRPr/>
+              <a:rPr lang="en-GB" dirty="0"/>
+              <a:t>the status of a LED is kept on the server</a:t>
+            </a:r>
+          </a:p>
+          <a:p>
+            <a:pPr marL="914400" lvl="1" indent="-317500" algn="l" rtl="0">
+              <a:spcBef>
+                <a:spcPts val="0"/>
+              </a:spcBef>
+              <a:spcAft>
+                <a:spcPts val="0"/>
+              </a:spcAft>
+              <a:buSzPts val="1400"/>
+              <a:buChar char="○"/>
+            </a:pPr>
+            <a:r>
+              <a:rPr lang="en-GB" dirty="0"/>
+              <a:t>each request is answered with a representation of the current state and with the necessary information on how to change the LED state</a:t>
+            </a:r>
+            <a:endParaRPr dirty="0"/>
           </a:p>
           <a:p>
             <a:pPr marL="457200" lvl="0" indent="-342900" algn="l" rtl="0">
@@ -15830,10 +15874,22 @@
               <a:buChar char="●"/>
             </a:pPr>
             <a:r>
-              <a:rPr lang="en-GB"/>
-              <a:t>Links are very important in WoT since they enable clients to discover related resources</a:t>
-            </a:r>
-            <a:endParaRPr/>
+              <a:rPr lang="en-GB" dirty="0"/>
+              <a:t>Links are very important in </a:t>
+            </a:r>
+            <a:r>
+              <a:rPr lang="en-GB" dirty="0" err="1"/>
+              <a:t>WoT</a:t>
+            </a:r>
+            <a:r>
+              <a:rPr lang="en-GB" dirty="0"/>
+              <a:t> since they enable clients to </a:t>
+            </a:r>
+            <a:r>
+              <a:rPr lang="en-GB" b="1" dirty="0"/>
+              <a:t>discover related resources</a:t>
+            </a:r>
+            <a:endParaRPr b="1" dirty="0"/>
           </a:p>
           <a:p>
             <a:pPr marL="914400" lvl="1" indent="-317500" algn="l" rtl="0">
@@ -15847,10 +15903,10 @@
               <a:buChar char="○"/>
             </a:pPr>
             <a:r>
-              <a:rPr lang="en-GB"/>
+              <a:rPr lang="en-GB" dirty="0"/>
               <a:t>by browsing (in the case of a human user following links on pages) </a:t>
             </a:r>
-            <a:endParaRPr/>
+            <a:endParaRPr dirty="0"/>
           </a:p>
           <a:p>
             <a:pPr marL="914400" lvl="1" indent="-317500" algn="l" rtl="0">
@@ -15864,10 +15920,10 @@
               <a:buChar char="○"/>
             </a:pPr>
             <a:r>
-              <a:rPr lang="en-GB"/>
+              <a:rPr lang="en-GB" dirty="0"/>
               <a:t>by crawling (in the case of a machine)</a:t>
             </a:r>
-            <a:endParaRPr/>
+            <a:endParaRPr dirty="0"/>
           </a:p>
           <a:p>
             <a:pPr marL="457200" lvl="0" indent="-342900" algn="l" rtl="0">
@@ -15881,10 +15937,10 @@
               <a:buChar char="●"/>
             </a:pPr>
             <a:r>
-              <a:rPr lang="en-GB"/>
+              <a:rPr lang="en-GB" dirty="0"/>
               <a:t>In short, linking resources allows them to be dynamically discovered and re-arranged without having to keep a “sitemap” somewhere</a:t>
             </a:r>
-            <a:endParaRPr/>
+            <a:endParaRPr dirty="0"/>
           </a:p>
           <a:p>
             <a:pPr marL="0" lvl="0" indent="0" algn="l" rtl="0">
@@ -15897,10 +15953,10 @@
               <a:buNone/>
             </a:pPr>
             <a:r>
-              <a:rPr lang="en-GB"/>
+              <a:rPr lang="en-GB" dirty="0"/>
               <a:t>	</a:t>
             </a:r>
-            <a:endParaRPr/>
+            <a:endParaRPr dirty="0"/>
           </a:p>
         </p:txBody>
       </p:sp>
@@ -16651,10 +16707,10 @@
               <a:buChar char="●"/>
             </a:pPr>
             <a:r>
-              <a:rPr lang="en-GB"/>
+              <a:rPr lang="en-GB" dirty="0"/>
               <a:t>Context: distributed applications</a:t>
             </a:r>
-            <a:endParaRPr/>
+            <a:endParaRPr dirty="0"/>
           </a:p>
           <a:p>
             <a:pPr marL="457200" lvl="0" indent="-342900" algn="l" rtl="0">
@@ -16668,10 +16724,10 @@
               <a:buChar char="●"/>
             </a:pPr>
             <a:r>
-              <a:rPr lang="en-GB"/>
-              <a:t>Communication follows the patterns of normal function calls, except that the function is actually running on another machine</a:t>
-            </a:r>
-            <a:endParaRPr/>
+              <a:rPr lang="en-GB" dirty="0"/>
+              <a:t>Communication follows the patterns of normal function calls, except that the function is running on another machine</a:t>
+            </a:r>
+            <a:endParaRPr dirty="0"/>
           </a:p>
           <a:p>
             <a:pPr marL="457200" lvl="0" indent="-342900" algn="l" rtl="0">
@@ -16685,10 +16741,10 @@
               <a:buChar char="●"/>
             </a:pPr>
             <a:r>
-              <a:rPr lang="en-GB"/>
+              <a:rPr lang="en-GB" dirty="0"/>
               <a:t>Calling it involves: </a:t>
             </a:r>
-            <a:endParaRPr/>
+            <a:endParaRPr dirty="0"/>
           </a:p>
           <a:p>
             <a:pPr marL="914400" lvl="1" indent="-317500" algn="l" rtl="0">
@@ -16702,10 +16758,10 @@
               <a:buChar char="○"/>
             </a:pPr>
             <a:r>
-              <a:rPr lang="en-GB"/>
+              <a:rPr lang="en-GB" dirty="0"/>
               <a:t>making a request to the server that includes the function’s name and arguments </a:t>
             </a:r>
-            <a:endParaRPr/>
+            <a:endParaRPr dirty="0"/>
           </a:p>
           <a:p>
             <a:pPr marL="914400" lvl="1" indent="-317500" algn="l" rtl="0">
@@ -16719,10 +16775,10 @@
               <a:buChar char="○"/>
             </a:pPr>
             <a:r>
-              <a:rPr lang="en-GB"/>
+              <a:rPr lang="en-GB" dirty="0"/>
               <a:t>the response to that request contains the returned value</a:t>
             </a:r>
-            <a:endParaRPr/>
+            <a:endParaRPr dirty="0"/>
           </a:p>
           <a:p>
             <a:pPr marL="457200" lvl="0" indent="-342900" algn="l" rtl="0">
@@ -16736,18 +16792,18 @@
               <a:buChar char="●"/>
             </a:pPr>
             <a:r>
-              <a:rPr lang="en-GB"/>
+              <a:rPr lang="en-GB" dirty="0"/>
               <a:t>When thinking in terms of RPC, HTTP is </a:t>
             </a:r>
             <a:r>
-              <a:rPr lang="en-GB" b="1"/>
+              <a:rPr lang="en-GB" b="1" dirty="0"/>
               <a:t>just a vehicle</a:t>
             </a:r>
             <a:r>
-              <a:rPr lang="en-GB"/>
+              <a:rPr lang="en-GB" dirty="0"/>
               <a:t> for communication, and you will most likely write an abstraction layer that hides it entirely</a:t>
             </a:r>
-            <a:endParaRPr/>
+            <a:endParaRPr dirty="0"/>
           </a:p>
           <a:p>
             <a:pPr marL="457200" lvl="0" indent="-342900" algn="l" rtl="0">
@@ -16761,18 +16817,18 @@
               <a:buChar char="●"/>
             </a:pPr>
             <a:r>
-              <a:rPr lang="en-GB"/>
+              <a:rPr lang="en-GB" dirty="0"/>
               <a:t>Another approach is to </a:t>
             </a:r>
             <a:r>
-              <a:rPr lang="en-GB" b="1"/>
+              <a:rPr lang="en-GB" b="1" dirty="0"/>
               <a:t>build your communication around the concept of resources and HTTP methods:</a:t>
             </a:r>
             <a:r>
-              <a:rPr lang="en-GB"/>
+              <a:rPr lang="en-GB" dirty="0"/>
               <a:t> </a:t>
             </a:r>
-            <a:endParaRPr/>
+            <a:endParaRPr dirty="0"/>
           </a:p>
           <a:p>
             <a:pPr marL="914400" lvl="1" indent="-317500" algn="l" rtl="0">
@@ -16786,10 +16842,22 @@
               <a:buChar char="○"/>
             </a:pPr>
             <a:r>
-              <a:rPr lang="en-GB"/>
-              <a:t>instead of a remote procedure called “addUser”, you use a POST request to /users/larry</a:t>
-            </a:r>
-            <a:endParaRPr/>
+              <a:rPr lang="en-GB" dirty="0"/>
+              <a:t>instead of a remote procedure called “</a:t>
+            </a:r>
+            <a:r>
+              <a:rPr lang="en-GB" dirty="0" err="1"/>
+              <a:t>addUser</a:t>
+            </a:r>
+            <a:r>
+              <a:rPr lang="en-GB" dirty="0"/>
+              <a:t>”, you use a POST request to /users/</a:t>
+            </a:r>
+            <a:r>
+              <a:rPr lang="en-GB" dirty="0" err="1"/>
+              <a:t>larry</a:t>
+            </a:r>
+            <a:endParaRPr dirty="0"/>
           </a:p>
           <a:p>
             <a:pPr marL="914400" lvl="1" indent="-317500" algn="l" rtl="0">
@@ -16803,10 +16871,10 @@
               <a:buChar char="○"/>
             </a:pPr>
             <a:r>
-              <a:rPr lang="en-GB"/>
+              <a:rPr lang="en-GB" dirty="0"/>
               <a:t>instead of encoding that user’s properties in function arguments, you define a document format, or use an existing format, that represents a user </a:t>
             </a:r>
-            <a:endParaRPr/>
+            <a:endParaRPr dirty="0"/>
           </a:p>
           <a:p>
             <a:pPr marL="1371600" lvl="2" indent="-317500" algn="l" rtl="0">
@@ -16820,10 +16888,10 @@
               <a:buChar char="■"/>
             </a:pPr>
             <a:r>
-              <a:rPr lang="en-GB"/>
+              <a:rPr lang="en-GB" dirty="0"/>
               <a:t>the body of the POST request to create a new resource is such document</a:t>
             </a:r>
-            <a:endParaRPr/>
+            <a:endParaRPr dirty="0"/>
           </a:p>
           <a:p>
             <a:pPr marL="1371600" lvl="2" indent="-317500" algn="l" rtl="0">
@@ -16837,10 +16905,10 @@
               <a:buChar char="■"/>
             </a:pPr>
             <a:r>
-              <a:rPr lang="en-GB"/>
+              <a:rPr lang="en-GB" dirty="0"/>
               <a:t>a resource is fetched by making a GET request to the resource’s URL, which returns the document representing the resource</a:t>
             </a:r>
-            <a:endParaRPr/>
+            <a:endParaRPr dirty="0"/>
           </a:p>
           <a:p>
             <a:pPr marL="457200" lvl="0" indent="-342900" algn="l" rtl="0">
@@ -16854,10 +16922,10 @@
               <a:buChar char="●"/>
             </a:pPr>
             <a:r>
-              <a:rPr lang="en-GB"/>
+              <a:rPr lang="en-GB" dirty="0"/>
               <a:t>It makes easier to use HTTP features</a:t>
             </a:r>
-            <a:endParaRPr/>
+            <a:endParaRPr dirty="0"/>
           </a:p>
           <a:p>
             <a:pPr marL="914400" lvl="1" indent="-317500" algn="l" rtl="0">
@@ -16871,10 +16939,10 @@
               <a:buChar char="○"/>
             </a:pPr>
             <a:r>
-              <a:rPr lang="en-GB"/>
+              <a:rPr lang="en-GB" dirty="0"/>
               <a:t>support for caching resources </a:t>
             </a:r>
-            <a:endParaRPr/>
+            <a:endParaRPr dirty="0"/>
           </a:p>
           <a:p>
             <a:pPr marL="914400" lvl="1" indent="-317500" algn="l" rtl="0">
@@ -16888,10 +16956,10 @@
               <a:buChar char="○"/>
             </a:pPr>
             <a:r>
-              <a:rPr lang="en-GB"/>
+              <a:rPr lang="en-GB" dirty="0"/>
               <a:t>coherence of the interface</a:t>
             </a:r>
-            <a:endParaRPr/>
+            <a:endParaRPr dirty="0"/>
           </a:p>
           <a:p>
             <a:pPr marL="914400" lvl="1" indent="-317500" algn="l" rtl="0">
@@ -16905,10 +16973,10 @@
               <a:buChar char="○"/>
             </a:pPr>
             <a:r>
-              <a:rPr lang="en-GB"/>
+              <a:rPr lang="en-GB" dirty="0"/>
               <a:t>simple to use by other developer</a:t>
             </a:r>
-            <a:endParaRPr/>
+            <a:endParaRPr dirty="0"/>
           </a:p>
         </p:txBody>
       </p:sp>
@@ -17133,7 +17201,7 @@
               </a:spcAft>
               <a:buNone/>
             </a:pPr>
-            <a:endParaRPr/>
+            <a:endParaRPr dirty="0"/>
           </a:p>
           <a:p>
             <a:pPr marL="0" lvl="0" indent="0" algn="l" rtl="0">
@@ -17145,7 +17213,7 @@
               </a:spcAft>
               <a:buNone/>
             </a:pPr>
-            <a:endParaRPr/>
+            <a:endParaRPr dirty="0"/>
           </a:p>
           <a:p>
             <a:pPr marL="0" lvl="0" indent="0" algn="l" rtl="0">
@@ -17157,7 +17225,7 @@
               </a:spcAft>
               <a:buNone/>
             </a:pPr>
-            <a:endParaRPr/>
+            <a:endParaRPr dirty="0"/>
           </a:p>
           <a:p>
             <a:pPr marL="0" lvl="0" indent="0" algn="l" rtl="0">
@@ -17169,7 +17237,7 @@
               </a:spcAft>
               <a:buNone/>
             </a:pPr>
-            <a:endParaRPr/>
+            <a:endParaRPr dirty="0"/>
           </a:p>
           <a:p>
             <a:pPr marL="0" lvl="0" indent="0" algn="l" rtl="0">
@@ -17181,7 +17249,7 @@
               </a:spcAft>
               <a:buNone/>
             </a:pPr>
-            <a:endParaRPr/>
+            <a:endParaRPr dirty="0"/>
           </a:p>
           <a:p>
             <a:pPr marL="0" lvl="0" indent="0" algn="l" rtl="0">
@@ -17193,7 +17261,7 @@
               </a:spcAft>
               <a:buNone/>
             </a:pPr>
-            <a:endParaRPr/>
+            <a:endParaRPr dirty="0"/>
           </a:p>
           <a:p>
             <a:pPr marL="0" lvl="0" indent="0" algn="l" rtl="0">
@@ -17205,7 +17273,7 @@
               </a:spcAft>
               <a:buNone/>
             </a:pPr>
-            <a:endParaRPr/>
+            <a:endParaRPr dirty="0"/>
           </a:p>
           <a:p>
             <a:pPr marL="0" lvl="0" indent="0" algn="l" rtl="0">
@@ -17226,10 +17294,26 @@
               <a:buNone/>
             </a:pPr>
             <a:r>
-              <a:rPr lang="en-GB"/>
-              <a:t>“The Swamp of POX” :  palude del vaiolo, POX “Plain Old XML” </a:t>
-            </a:r>
-            <a:endParaRPr b="1">
+              <a:rPr lang="en-GB" dirty="0"/>
+              <a:t>“The Swamp of POX” :  </a:t>
+            </a:r>
+            <a:r>
+              <a:rPr lang="en-GB" dirty="0" err="1"/>
+              <a:t>palude</a:t>
+            </a:r>
+            <a:r>
+              <a:rPr lang="en-GB" dirty="0"/>
+              <a:t> del </a:t>
+            </a:r>
+            <a:r>
+              <a:rPr lang="en-GB" dirty="0" err="1"/>
+              <a:t>vaiolo</a:t>
+            </a:r>
+            <a:r>
+              <a:rPr lang="en-GB" dirty="0"/>
+              <a:t>, POX “Plain Old XML” </a:t>
+            </a:r>
+            <a:endParaRPr b="1" dirty="0">
               <a:solidFill>
                 <a:srgbClr val="79BE27"/>
               </a:solidFill>
@@ -17248,7 +17332,7 @@
               </a:spcAft>
               <a:buNone/>
             </a:pPr>
-            <a:endParaRPr/>
+            <a:endParaRPr dirty="0"/>
           </a:p>
         </p:txBody>
       </p:sp>
@@ -20294,43 +20378,24 @@
               <a:rPr lang="en-GB" b="1" dirty="0"/>
               <a:t>WebSocket data frames</a:t>
             </a:r>
-            <a:endParaRPr dirty="0"/>
-          </a:p>
-          <a:p>
-            <a:pPr marL="1371600" marR="0" lvl="2" indent="-317500" algn="l" rtl="0">
-              <a:lnSpc>
-                <a:spcPct val="115000"/>
-              </a:lnSpc>
-              <a:spcBef>
-                <a:spcPts val="0"/>
-              </a:spcBef>
-              <a:spcAft>
-                <a:spcPts val="0"/>
-              </a:spcAft>
-              <a:buClr>
-                <a:schemeClr val="dk1"/>
-              </a:buClr>
-              <a:buSzPts val="1400"/>
-              <a:buFont typeface="Open Sans"/>
-              <a:buChar char="■"/>
+          </a:p>
+          <a:p>
+            <a:pPr lvl="2">
+              <a:spcBef>
+                <a:spcPts val="0"/>
+              </a:spcBef>
+              <a:buChar char="○"/>
             </a:pPr>
             <a:r>
               <a:rPr lang="en-GB" dirty="0"/>
-              <a:t>the overhead of a data frame is 2 bytes which </a:t>
+              <a:t>overhead: 2 bytes which is very small compared </a:t>
             </a:r>
             <a:br>
               <a:rPr lang="en-GB" dirty="0"/>
             </a:br>
             <a:r>
               <a:rPr lang="en-GB" dirty="0"/>
-              <a:t>is very small compared to the 871 bytes </a:t>
-            </a:r>
-            <a:br>
-              <a:rPr lang="en-GB" dirty="0"/>
-            </a:br>
-            <a:r>
-              <a:rPr lang="en-GB" dirty="0"/>
-              <a:t>overhead of an HTTP message</a:t>
+              <a:t>to the 871 bytes of an HTTP message</a:t>
             </a:r>
             <a:endParaRPr dirty="0"/>
           </a:p>
